--- a/test.pptx
+++ b/test.pptx
@@ -7,6 +7,7 @@
   <p:sldIdLst>
     <p:sldId id="256" r:id="rId2"/>
     <p:sldId id="257" r:id="rId3"/>
+    <p:sldId id="258" r:id="rId4"/>
   </p:sldIdLst>
   <p:sldSz cx="9144000" cy="5143500" type="screen16x9"/>
   <p:notesSz cx="6858000" cy="9144000"/>
@@ -3153,7 +3154,12 @@
             <p:ph type="title"/>
           </p:nvPr>
         </p:nvSpPr>
-        <p:spPr/>
+        <p:spPr>
+          <a:xfrm>
+            <a:off x="457201" y="204787"/>
+            <a:ext cx="3008313" cy="871538"/>
+          </a:xfrm>
+        </p:spPr>
         <p:txBody>
           <a:bodyPr/>
           <a:lstStyle/>
@@ -3170,12 +3176,12 @@
       </p:sp>
       <p:sp>
         <p:nvSpPr>
-          <p:cNvPr id="3" name="Content Placeholder 2"/>
-          <p:cNvSpPr>
-            <a:spLocks noGrp="1"/>
-          </p:cNvSpPr>
-          <p:nvPr>
-            <p:ph idx="1"/>
+          <p:cNvPr id="4" name="Text Placeholder 3"/>
+          <p:cNvSpPr>
+            <a:spLocks noGrp="1"/>
+          </p:cNvSpPr>
+          <p:nvPr>
+            <p:ph idx="2" sz="half" type="body"/>
           </p:nvPr>
         </p:nvSpPr>
         <p:spPr/>
@@ -3242,53 +3248,66 @@
               <a:t>A picture :</a:t>
             </a:r>
           </a:p>
-          <a:p>
-            <a:pPr lvl="0" indent="0" marL="0">
-              <a:spcBef>
-                <a:spcPts val="3000"/>
-              </a:spcBef>
+        </p:txBody>
+      </p:sp>
+      <p:pic>
+        <p:nvPicPr>
+          <p:cNvPr descr="images/stories_in_a_dystopian_arc.jpg" id="0" name="Picture 1"/>
+          <p:cNvPicPr>
+            <a:picLocks noGrp="1" noChangeAspect="1"/>
+          </p:cNvPicPr>
+          <p:nvPr/>
+        </p:nvPicPr>
+        <p:blipFill>
+          <a:blip r:embed="rId2"/>
+          <a:stretch>
+            <a:fillRect/>
+          </a:stretch>
+        </p:blipFill>
+        <p:spPr bwMode="auto">
+          <a:xfrm>
+            <a:off x="3568700" y="711200"/>
+            <a:ext cx="5105400" cy="2844800"/>
+          </a:xfrm>
+          <a:prstGeom prst="rect">
+            <a:avLst/>
+          </a:prstGeom>
+          <a:noFill/>
+          <a:ln w="9525">
+            <a:noFill/>
+            <a:headEnd/>
+            <a:tailEnd/>
+          </a:ln>
+        </p:spPr>
+      </p:pic>
+      <p:sp>
+        <p:nvSpPr>
+          <p:cNvPr id="1" name="TextBox 3"/>
+          <p:cNvSpPr txBox="1"/>
+          <p:nvPr>
+            <p:ph idx="1"/>
+          </p:nvPr>
+        </p:nvSpPr>
+        <p:spPr>
+          <a:xfrm>
+            <a:off x="3568700" y="4076700"/>
+            <a:ext cx="5105400" cy="508000"/>
+          </a:xfrm>
+          <a:prstGeom prst="rect">
+            <a:avLst/>
+          </a:prstGeom>
+          <a:noFill/>
+        </p:spPr>
+        <p:txBody>
+          <a:bodyPr/>
+          <a:lstStyle/>
+          <a:p>
+            <a:pPr lvl="0" indent="0" marL="0" algn="ctr">
               <a:buNone/>
             </a:pPr>
             <a:r>
-              <a:rPr b="1"/>
-              <a:t>another subheaee</a:t>
-            </a:r>
-          </a:p>
-          <a:p>
-            <a:pPr lvl="0" indent="0" marL="0">
-              <a:buNone/>
-            </a:pPr>
-            <a:r>
               <a:rPr/>
-              <a:t>With a</a:t>
-            </a:r>
-          </a:p>
-          <a:p>
-            <a:pPr lvl="0" indent="0" marL="0">
-              <a:spcBef>
-                <a:spcPts val="3000"/>
-              </a:spcBef>
-              <a:buNone/>
-            </a:pPr>
-            <a:r>
-              <a:rPr b="1"/>
-              <a:t>sub-sub header</a:t>
-            </a:r>
-          </a:p>
-          <a:p>
-            <a:pPr lvl="0"/>
-            <a:r>
-              <a:rPr/>
-              <a:t>an another lis</a:t>
-            </a:r>
-          </a:p>
-          <a:p>
-            <a:pPr lvl="1" indent="0" marL="1270000">
-              <a:buNone/>
-            </a:pPr>
-            <a:r>
-              <a:rPr sz="2000"/>
-              <a:t>with a quote inside</a:t>
+              <a:t>Stories in the Dystopian Architecture</a:t>
             </a:r>
           </a:p>
         </p:txBody>
@@ -3329,7 +3348,7 @@
                                           </p:stCondLst>
                                         </p:cTn>
                                         <p:tgtEl>
-                                          <p:spTgt spid="3">
+                                          <p:spTgt spid="4">
                                             <p:txEl>
                                               <p:pRg st="2" end="2"/>
                                             </p:txEl>
@@ -3378,7 +3397,7 @@
                                           </p:stCondLst>
                                         </p:cTn>
                                         <p:tgtEl>
-                                          <p:spTgt spid="3">
+                                          <p:spTgt spid="4">
                                             <p:txEl>
                                               <p:pRg st="3" end="3"/>
                                             </p:txEl>
@@ -3427,7 +3446,7 @@
                                           </p:stCondLst>
                                         </p:cTn>
                                         <p:tgtEl>
-                                          <p:spTgt spid="3">
+                                          <p:spTgt spid="4">
                                             <p:txEl>
                                               <p:pRg st="4" end="4"/>
                                             </p:txEl>
@@ -3472,9 +3491,109 @@
       </p:par>
     </p:tnLst>
     <p:bldLst>
-      <p:bldP spid="3" grpId="0" uiExpand="1" build="p"/>
+      <p:bldP spid="4" grpId="0" uiExpand="1" build="p"/>
     </p:bldLst>
   </p:timing>
+</p:sld>
+</file>
+
+<file path=ppt/slides/slide3.xml><?xml version="1.0" encoding="utf-8"?>
+<p:sld xmlns:a="http://schemas.openxmlformats.org/drawingml/2006/main" xmlns:r="http://schemas.openxmlformats.org/officeDocument/2006/relationships" xmlns:p="http://schemas.openxmlformats.org/presentationml/2006/main">
+  <p:cSld>
+    <p:spTree>
+      <p:nvGrpSpPr>
+        <p:cNvPr id="1" name=""/>
+        <p:cNvGrpSpPr/>
+        <p:nvPr/>
+      </p:nvGrpSpPr>
+      <p:grpSpPr>
+        <a:xfrm>
+          <a:off x="0" y="0"/>
+          <a:ext cx="0" cy="0"/>
+          <a:chOff x="0" y="0"/>
+          <a:chExt cx="0" cy="0"/>
+        </a:xfrm>
+      </p:grpSpPr>
+      <p:sp>
+        <p:nvSpPr>
+          <p:cNvPr id="2" name="Title 1"/>
+          <p:cNvSpPr>
+            <a:spLocks noGrp="1"/>
+          </p:cNvSpPr>
+          <p:nvPr>
+            <p:ph type="title"/>
+          </p:nvPr>
+        </p:nvSpPr>
+        <p:spPr/>
+        <p:txBody>
+          <a:bodyPr/>
+          <a:lstStyle/>
+          <a:p>
+            <a:pPr lvl="0" indent="0" marL="0">
+              <a:buNone/>
+            </a:pPr>
+            <a:r>
+              <a:rPr/>
+              <a:t>another subheader</a:t>
+            </a:r>
+          </a:p>
+        </p:txBody>
+      </p:sp>
+      <p:sp>
+        <p:nvSpPr>
+          <p:cNvPr id="3" name="Content Placeholder 2"/>
+          <p:cNvSpPr>
+            <a:spLocks noGrp="1"/>
+          </p:cNvSpPr>
+          <p:nvPr>
+            <p:ph idx="1"/>
+          </p:nvPr>
+        </p:nvSpPr>
+        <p:spPr/>
+        <p:txBody>
+          <a:bodyPr/>
+          <a:lstStyle/>
+          <a:p>
+            <a:pPr lvl="0" indent="0" marL="0">
+              <a:buNone/>
+            </a:pPr>
+            <a:r>
+              <a:rPr/>
+              <a:t>With a</a:t>
+            </a:r>
+          </a:p>
+          <a:p>
+            <a:pPr lvl="0" indent="0" marL="0">
+              <a:spcBef>
+                <a:spcPts val="3000"/>
+              </a:spcBef>
+              <a:buNone/>
+            </a:pPr>
+            <a:r>
+              <a:rPr b="1"/>
+              <a:t>sub-sub header</a:t>
+            </a:r>
+          </a:p>
+          <a:p>
+            <a:pPr lvl="0"/>
+            <a:r>
+              <a:rPr/>
+              <a:t>an another lis</a:t>
+            </a:r>
+          </a:p>
+          <a:p>
+            <a:pPr lvl="1" indent="0" marL="1270000">
+              <a:buNone/>
+            </a:pPr>
+            <a:r>
+              <a:rPr sz="2000"/>
+              <a:t>with a quote inside</a:t>
+            </a:r>
+          </a:p>
+        </p:txBody>
+      </p:sp>
+    </p:spTree>
+  </p:cSld>
 </p:sld>
 </file>
 
